--- a/lab_10-requesting_data/lab_10-requesting_data.pptx
+++ b/lab_10-requesting_data/lab_10-requesting_data.pptx
@@ -10,8 +10,8 @@
   <p:sldIdLst>
     <p:sldId id="259" r:id="rId2"/>
     <p:sldId id="295" r:id="rId3"/>
-    <p:sldId id="398" r:id="rId4"/>
-    <p:sldId id="400" r:id="rId5"/>
+    <p:sldId id="410" r:id="rId4"/>
+    <p:sldId id="411" r:id="rId5"/>
     <p:sldId id="374" r:id="rId6"/>
     <p:sldId id="368" r:id="rId7"/>
     <p:sldId id="407" r:id="rId8"/>
@@ -208,7 +208,7 @@
           <a:p>
             <a:fld id="{81C4B3FE-0320-8142-8396-5C3025C019EC}" type="datetimeFigureOut">
               <a:rPr lang="en-IT" smtClean="0"/>
-              <a:t>5/4/24</a:t>
+              <a:t>5/5/25</a:t>
             </a:fld>
             <a:endParaRPr lang="en-IT"/>
           </a:p>
@@ -1678,7 +1678,9 @@
           <a:lstStyle>
             <a:lvl1pPr marL="0" indent="0" algn="ctr">
               <a:buNone/>
-              <a:defRPr sz="4800" b="1"/>
+              <a:defRPr sz="4800" b="1">
+                <a:latin typeface="Aptos" panose="020B0004020202020204" pitchFamily="34" charset="0"/>
+              </a:defRPr>
             </a:lvl1pPr>
             <a:lvl2pPr marL="457200" indent="0" algn="ctr">
               <a:buNone/>
@@ -1764,7 +1766,9 @@
           <a:lstStyle/>
           <a:p>
             <a:pPr algn="ctr"/>
-            <a:endParaRPr lang="en-GB" dirty="0"/>
+            <a:endParaRPr lang="en-GB" dirty="0">
+              <a:latin typeface="Aptos" panose="020B0004020202020204" pitchFamily="34" charset="0"/>
+            </a:endParaRPr>
           </a:p>
         </p:txBody>
       </p:sp>
@@ -1814,7 +1818,9 @@
           <a:lstStyle/>
           <a:p>
             <a:pPr algn="ctr"/>
-            <a:endParaRPr lang="en-GB" dirty="0"/>
+            <a:endParaRPr lang="en-GB" dirty="0">
+              <a:latin typeface="Aptos" panose="020B0004020202020204" pitchFamily="34" charset="0"/>
+            </a:endParaRPr>
           </a:p>
         </p:txBody>
       </p:sp>
@@ -1860,36 +1866,52 @@
           </a:lstStyle>
           <a:p>
             <a:r>
-              <a:rPr lang="it-IT" sz="2800" b="0" dirty="0" err="1"/>
+              <a:rPr lang="it-IT" sz="2800" b="0" dirty="0" err="1">
+                <a:latin typeface="Aptos" panose="020B0004020202020204" pitchFamily="34" charset="0"/>
+              </a:rPr>
               <a:t>Biomedical</a:t>
             </a:r>
             <a:r>
-              <a:rPr lang="it-IT" sz="2800" b="0" dirty="0"/>
+              <a:rPr lang="it-IT" sz="2800" b="0" dirty="0">
+                <a:latin typeface="Aptos" panose="020B0004020202020204" pitchFamily="34" charset="0"/>
+              </a:rPr>
               <a:t> </a:t>
             </a:r>
             <a:r>
-              <a:rPr lang="it-IT" sz="2800" b="0" dirty="0" err="1"/>
+              <a:rPr lang="it-IT" sz="2800" b="0" dirty="0" err="1">
+                <a:latin typeface="Aptos" panose="020B0004020202020204" pitchFamily="34" charset="0"/>
+              </a:rPr>
               <a:t>Wearable</a:t>
             </a:r>
             <a:r>
-              <a:rPr lang="it-IT" sz="2800" b="0" dirty="0"/>
+              <a:rPr lang="it-IT" sz="2800" b="0" dirty="0">
+                <a:latin typeface="Aptos" panose="020B0004020202020204" pitchFamily="34" charset="0"/>
+              </a:rPr>
               <a:t> Technologies </a:t>
             </a:r>
           </a:p>
           <a:p>
             <a:r>
-              <a:rPr lang="it-IT" sz="2800" b="0" dirty="0"/>
+              <a:rPr lang="it-IT" sz="2800" b="0" dirty="0">
+                <a:latin typeface="Aptos" panose="020B0004020202020204" pitchFamily="34" charset="0"/>
+              </a:rPr>
               <a:t>for Healthcare and </a:t>
             </a:r>
             <a:r>
-              <a:rPr lang="it-IT" sz="2800" b="0" dirty="0" err="1"/>
+              <a:rPr lang="it-IT" sz="2800" b="0" dirty="0" err="1">
+                <a:latin typeface="Aptos" panose="020B0004020202020204" pitchFamily="34" charset="0"/>
+              </a:rPr>
               <a:t>Wellbeing</a:t>
             </a:r>
             <a:r>
-              <a:rPr lang="it-IT" sz="2800" b="0" dirty="0"/>
+              <a:rPr lang="it-IT" sz="2800" b="0" dirty="0">
+                <a:latin typeface="Aptos" panose="020B0004020202020204" pitchFamily="34" charset="0"/>
+              </a:rPr>
               <a:t>  </a:t>
             </a:r>
-            <a:endParaRPr lang="en-GB" sz="2800" b="0" dirty="0"/>
+            <a:endParaRPr lang="en-GB" sz="2800" b="0" dirty="0">
+              <a:latin typeface="Aptos" panose="020B0004020202020204" pitchFamily="34" charset="0"/>
+            </a:endParaRPr>
           </a:p>
         </p:txBody>
       </p:sp>
@@ -1940,8 +1962,10 @@
               </a:spcAft>
             </a:pPr>
             <a:r>
-              <a:rPr lang="it-IT" sz="2800" dirty="0"/>
-              <a:t>A.Y. 2023-2024</a:t>
+              <a:rPr lang="it-IT" sz="2800" dirty="0">
+                <a:latin typeface="Aptos" panose="020B0004020202020204" pitchFamily="34" charset="0"/>
+              </a:rPr>
+              <a:t>A.Y. 2024-2025</a:t>
             </a:r>
           </a:p>
         </p:txBody>
@@ -1980,7 +2004,7 @@
                 <a:effectLst/>
                 <a:uLnTx/>
                 <a:uFillTx/>
-                <a:latin typeface="Palatino Linotype" panose="02040502050505030304" pitchFamily="18" charset="0"/>
+                <a:latin typeface="Aptos" panose="020B0004020202020204" pitchFamily="34" charset="0"/>
                 <a:ea typeface="+mj-ea"/>
                 <a:cs typeface="+mj-cs"/>
               </a:rPr>
@@ -1997,7 +2021,7 @@
                 <a:effectLst/>
                 <a:uLnTx/>
                 <a:uFillTx/>
-                <a:latin typeface="Palatino Linotype" panose="02040502050505030304" pitchFamily="18" charset="0"/>
+                <a:latin typeface="Aptos" panose="020B0004020202020204" pitchFamily="34" charset="0"/>
                 <a:ea typeface="+mj-ea"/>
                 <a:cs typeface="+mj-cs"/>
               </a:rPr>
@@ -2014,7 +2038,7 @@
                 <a:effectLst/>
                 <a:uLnTx/>
                 <a:uFillTx/>
-                <a:latin typeface="Palatino Linotype" panose="02040502050505030304" pitchFamily="18" charset="0"/>
+                <a:latin typeface="Aptos" panose="020B0004020202020204" pitchFamily="34" charset="0"/>
                 <a:ea typeface="+mj-ea"/>
                 <a:cs typeface="+mj-cs"/>
               </a:rPr>
@@ -2030,7 +2054,7 @@
                 <a:effectLst/>
                 <a:uLnTx/>
                 <a:uFillTx/>
-                <a:latin typeface="Palatino Linotype" panose="02040502050505030304" pitchFamily="18" charset="0"/>
+                <a:latin typeface="Aptos" panose="020B0004020202020204" pitchFamily="34" charset="0"/>
                 <a:ea typeface="+mj-ea"/>
                 <a:cs typeface="+mj-cs"/>
               </a:rPr>
@@ -2047,7 +2071,7 @@
                 <a:effectLst/>
                 <a:uLnTx/>
                 <a:uFillTx/>
-                <a:latin typeface="Palatino Linotype" panose="02040502050505030304" pitchFamily="18" charset="0"/>
+                <a:latin typeface="Aptos" panose="020B0004020202020204" pitchFamily="34" charset="0"/>
                 <a:ea typeface="+mj-ea"/>
                 <a:cs typeface="+mj-cs"/>
               </a:rPr>
@@ -2064,13 +2088,15 @@
                 <a:effectLst/>
                 <a:uLnTx/>
                 <a:uFillTx/>
-                <a:latin typeface="Palatino Linotype" panose="02040502050505030304" pitchFamily="18" charset="0"/>
+                <a:latin typeface="Aptos" panose="020B0004020202020204" pitchFamily="34" charset="0"/>
                 <a:ea typeface="+mj-ea"/>
                 <a:cs typeface="+mj-cs"/>
               </a:rPr>
               <a:t>Engineering</a:t>
             </a:r>
-            <a:endParaRPr lang="en-GB" sz="1100" cap="small" baseline="0" dirty="0"/>
+            <a:endParaRPr lang="en-GB" sz="1100" cap="small" baseline="0" dirty="0">
+              <a:latin typeface="Aptos" panose="020B0004020202020204" pitchFamily="34" charset="0"/>
+            </a:endParaRPr>
           </a:p>
         </p:txBody>
       </p:sp>
@@ -2180,7 +2206,9 @@
           </a:bodyPr>
           <a:lstStyle>
             <a:lvl1pPr>
-              <a:defRPr sz="3200"/>
+              <a:defRPr sz="3200">
+                <a:latin typeface="Aptos" panose="020B0004020202020204" pitchFamily="34" charset="0"/>
+              </a:defRPr>
             </a:lvl1pPr>
           </a:lstStyle>
           <a:p>
@@ -2580,12 +2608,14 @@
                     <a:tint val="75000"/>
                   </a:schemeClr>
                 </a:solidFill>
+                <a:latin typeface="Aptos" panose="020B0004020202020204" pitchFamily="34" charset="0"/>
               </a:defRPr>
             </a:lvl1pPr>
           </a:lstStyle>
           <a:p>
             <a:fld id="{31DE2C5B-556E-47B8-A792-024C2FCA4ACC}" type="slidenum">
               <a:rPr lang="en-GB" smtClean="0"/>
+              <a:pPr/>
               <a:t>‹#›</a:t>
             </a:fld>
             <a:endParaRPr lang="en-GB"/>
@@ -2620,7 +2650,7 @@
           <a:solidFill>
             <a:schemeClr val="tx1"/>
           </a:solidFill>
-          <a:latin typeface="Palatino Linotype" panose="02040502050505030304" pitchFamily="18" charset="0"/>
+          <a:latin typeface="Aptos" panose="020B0004020202020204" pitchFamily="34" charset="0"/>
           <a:ea typeface="+mj-ea"/>
           <a:cs typeface="+mj-cs"/>
         </a:defRPr>
@@ -2643,7 +2673,7 @@
           <a:solidFill>
             <a:schemeClr val="tx1"/>
           </a:solidFill>
-          <a:latin typeface="Palatino Linotype" panose="02040502050505030304" pitchFamily="18" charset="0"/>
+          <a:latin typeface="Aptos" panose="020B0004020202020204" pitchFamily="34" charset="0"/>
           <a:ea typeface="+mn-ea"/>
           <a:cs typeface="+mn-cs"/>
         </a:defRPr>
@@ -2664,7 +2694,7 @@
           <a:solidFill>
             <a:schemeClr val="tx1"/>
           </a:solidFill>
-          <a:latin typeface="Palatino Linotype" panose="02040502050505030304" pitchFamily="18" charset="0"/>
+          <a:latin typeface="Aptos" panose="020B0004020202020204" pitchFamily="34" charset="0"/>
           <a:ea typeface="+mn-ea"/>
           <a:cs typeface="+mn-cs"/>
         </a:defRPr>
@@ -2685,7 +2715,7 @@
           <a:solidFill>
             <a:schemeClr val="tx1"/>
           </a:solidFill>
-          <a:latin typeface="Palatino Linotype" panose="02040502050505030304" pitchFamily="18" charset="0"/>
+          <a:latin typeface="Aptos" panose="020B0004020202020204" pitchFamily="34" charset="0"/>
           <a:ea typeface="+mn-ea"/>
           <a:cs typeface="+mn-cs"/>
         </a:defRPr>
@@ -2706,7 +2736,7 @@
           <a:solidFill>
             <a:schemeClr val="tx1"/>
           </a:solidFill>
-          <a:latin typeface="Palatino Linotype" panose="02040502050505030304" pitchFamily="18" charset="0"/>
+          <a:latin typeface="Aptos" panose="020B0004020202020204" pitchFamily="34" charset="0"/>
           <a:ea typeface="+mn-ea"/>
           <a:cs typeface="+mn-cs"/>
         </a:defRPr>
@@ -2727,7 +2757,7 @@
           <a:solidFill>
             <a:schemeClr val="tx1"/>
           </a:solidFill>
-          <a:latin typeface="Palatino Linotype" panose="02040502050505030304" pitchFamily="18" charset="0"/>
+          <a:latin typeface="Aptos" panose="020B0004020202020204" pitchFamily="34" charset="0"/>
           <a:ea typeface="+mn-ea"/>
           <a:cs typeface="+mn-cs"/>
         </a:defRPr>
@@ -3285,16 +3315,22 @@
           </a:lstStyle>
           <a:p>
             <a:r>
-              <a:rPr lang="en-US" dirty="0"/>
+              <a:rPr lang="en-US" dirty="0">
+                <a:latin typeface="Aptos" panose="020B0004020202020204" pitchFamily="34" charset="0"/>
+              </a:rPr>
               <a:t>Get familiar with the example</a:t>
             </a:r>
           </a:p>
           <a:p>
-            <a:endParaRPr lang="en-US" dirty="0"/>
-          </a:p>
-          <a:p>
-            <a:r>
-              <a:rPr lang="en-US" dirty="0"/>
+            <a:endParaRPr lang="en-US" dirty="0">
+              <a:latin typeface="Aptos" panose="020B0004020202020204" pitchFamily="34" charset="0"/>
+            </a:endParaRPr>
+          </a:p>
+          <a:p>
+            <a:r>
+              <a:rPr lang="en-US" dirty="0">
+                <a:latin typeface="Aptos" panose="020B0004020202020204" pitchFamily="34" charset="0"/>
+              </a:rPr>
               <a:t>Try to integrate the request data flow in your project </a:t>
             </a:r>
           </a:p>
@@ -4178,6 +4214,7 @@
                 <a:solidFill>
                   <a:srgbClr val="C00000"/>
                 </a:solidFill>
+                <a:latin typeface="Aptos" panose="020B0004020202020204" pitchFamily="34" charset="0"/>
               </a:rPr>
               <a:t>https://impact.dei.unipd.it/bwthw/</a:t>
             </a:r>
@@ -4486,7 +4523,9 @@
               <a:buNone/>
             </a:pPr>
             <a:r>
-              <a:rPr lang="en-IT" sz="1400" dirty="0"/>
+              <a:rPr lang="en-IT" sz="1400" dirty="0">
+                <a:latin typeface="Aptos" panose="020B0004020202020204" pitchFamily="34" charset="0"/>
+              </a:rPr>
               <a:t>Your app</a:t>
             </a:r>
           </a:p>
@@ -4704,7 +4743,9 @@
               <a:buNone/>
             </a:pPr>
             <a:r>
-              <a:rPr lang="en-IT" sz="1600" b="1" dirty="0"/>
+              <a:rPr lang="en-IT" sz="1600" b="1" dirty="0">
+                <a:latin typeface="Aptos" panose="020B0004020202020204" pitchFamily="34" charset="0"/>
+              </a:rPr>
               <a:t>HTTPS requests/responses</a:t>
             </a:r>
           </a:p>
@@ -4797,7 +4838,9 @@
           <a:lstStyle/>
           <a:p>
             <a:pPr algn="ctr"/>
-            <a:endParaRPr lang="en-IT"/>
+            <a:endParaRPr lang="en-IT">
+              <a:latin typeface="Aptos" panose="020B0004020202020204" pitchFamily="34" charset="0"/>
+            </a:endParaRPr>
           </a:p>
         </p:txBody>
       </p:sp>
@@ -5013,7 +5056,9 @@
               <a:buNone/>
             </a:pPr>
             <a:r>
-              <a:rPr lang="en-IT" sz="1400" dirty="0"/>
+              <a:rPr lang="en-IT" sz="1400" dirty="0">
+                <a:latin typeface="Aptos" panose="020B0004020202020204" pitchFamily="34" charset="0"/>
+              </a:rPr>
               <a:t>(If credentials are ok) Receive token</a:t>
             </a:r>
           </a:p>
@@ -5311,7 +5356,9 @@
               <a:buNone/>
             </a:pPr>
             <a:r>
-              <a:rPr lang="en-IT" sz="1400" dirty="0"/>
+              <a:rPr lang="en-IT" sz="1400" dirty="0">
+                <a:latin typeface="Aptos" panose="020B0004020202020204" pitchFamily="34" charset="0"/>
+              </a:rPr>
               <a:t>Ask for specific data using token</a:t>
             </a:r>
           </a:p>
@@ -5570,7 +5617,9 @@
               <a:buNone/>
             </a:pPr>
             <a:r>
-              <a:rPr lang="en-IT" sz="1400" dirty="0"/>
+              <a:rPr lang="en-IT" sz="1400" dirty="0">
+                <a:latin typeface="Aptos" panose="020B0004020202020204" pitchFamily="34" charset="0"/>
+              </a:rPr>
               <a:t>(If request is ok) Receive data (JSON format)</a:t>
             </a:r>
           </a:p>
@@ -5740,7 +5789,9 @@
           <a:lstStyle/>
           <a:p>
             <a:pPr algn="ctr"/>
-            <a:endParaRPr lang="en-IT"/>
+            <a:endParaRPr lang="en-IT">
+              <a:latin typeface="Aptos" panose="020B0004020202020204" pitchFamily="34" charset="0"/>
+            </a:endParaRPr>
           </a:p>
         </p:txBody>
       </p:sp>
@@ -5789,7 +5840,9 @@
           <a:lstStyle/>
           <a:p>
             <a:pPr algn="ctr"/>
-            <a:endParaRPr lang="en-IT"/>
+            <a:endParaRPr lang="en-IT">
+              <a:latin typeface="Aptos" panose="020B0004020202020204" pitchFamily="34" charset="0"/>
+            </a:endParaRPr>
           </a:p>
         </p:txBody>
       </p:sp>
@@ -6004,7 +6057,9 @@
               <a:buNone/>
             </a:pPr>
             <a:r>
-              <a:rPr lang="en-IT" b="1" dirty="0"/>
+              <a:rPr lang="en-IT" b="1" dirty="0">
+                <a:latin typeface="Aptos" panose="020B0004020202020204" pitchFamily="34" charset="0"/>
+              </a:rPr>
               <a:t>Lesson 9</a:t>
             </a:r>
           </a:p>
@@ -6221,7 +6276,9 @@
               <a:buNone/>
             </a:pPr>
             <a:r>
-              <a:rPr lang="en-IT" b="1" dirty="0"/>
+              <a:rPr lang="en-IT" b="1" dirty="0">
+                <a:latin typeface="Aptos" panose="020B0004020202020204" pitchFamily="34" charset="0"/>
+              </a:rPr>
               <a:t>Lesson 10</a:t>
             </a:r>
           </a:p>
@@ -6313,7 +6370,7 @@
     </p:spTree>
     <p:extLst>
       <p:ext uri="{BB962C8B-B14F-4D97-AF65-F5344CB8AC3E}">
-        <p14:creationId xmlns:p14="http://schemas.microsoft.com/office/powerpoint/2010/main" val="1807656441"/>
+        <p14:creationId xmlns:p14="http://schemas.microsoft.com/office/powerpoint/2010/main" val="121948299"/>
       </p:ext>
     </p:extLst>
   </p:cSld>
@@ -6442,7 +6499,7 @@
             <a:pPr algn="ctr"/>
             <a:r>
               <a:rPr lang="en-IT" dirty="0">
-                <a:latin typeface="Palatino Linotype" panose="02040502050505030304" pitchFamily="18" charset="0"/>
+                <a:latin typeface="Aptos" panose="020B0004020202020204" pitchFamily="34" charset="0"/>
               </a:rPr>
               <a:t>Use credentials to ask for a JWT token pair</a:t>
             </a:r>
@@ -6492,7 +6549,7 @@
             <a:pPr algn="ctr"/>
             <a:r>
               <a:rPr lang="en-IT" dirty="0">
-                <a:latin typeface="Palatino Linotype" panose="02040502050505030304" pitchFamily="18" charset="0"/>
+                <a:latin typeface="Aptos" panose="020B0004020202020204" pitchFamily="34" charset="0"/>
               </a:rPr>
               <a:t>Receive JWT token pair</a:t>
             </a:r>
@@ -6542,7 +6599,7 @@
             <a:pPr algn="ctr"/>
             <a:r>
               <a:rPr lang="en-IT" dirty="0">
-                <a:latin typeface="Palatino Linotype" panose="02040502050505030304" pitchFamily="18" charset="0"/>
+                <a:latin typeface="Aptos" panose="020B0004020202020204" pitchFamily="34" charset="0"/>
               </a:rPr>
               <a:t>Store token pair for making calls</a:t>
             </a:r>
@@ -6678,7 +6735,7 @@
             <a:pPr algn="ctr"/>
             <a:r>
               <a:rPr lang="en-IT" dirty="0">
-                <a:latin typeface="Palatino Linotype" panose="02040502050505030304" pitchFamily="18" charset="0"/>
+                <a:latin typeface="Aptos" panose="020B0004020202020204" pitchFamily="34" charset="0"/>
               </a:rPr>
               <a:t>Access token expired?</a:t>
             </a:r>
@@ -6728,7 +6785,7 @@
             <a:pPr algn="ctr"/>
             <a:r>
               <a:rPr lang="en-IT" dirty="0">
-                <a:latin typeface="Palatino Linotype" panose="02040502050505030304" pitchFamily="18" charset="0"/>
+                <a:latin typeface="Aptos" panose="020B0004020202020204" pitchFamily="34" charset="0"/>
               </a:rPr>
               <a:t>Make a call to get data using access token</a:t>
             </a:r>
@@ -7124,6 +7181,7 @@
                 <a:solidFill>
                   <a:srgbClr val="C00000"/>
                 </a:solidFill>
+                <a:latin typeface="Aptos" panose="020B0004020202020204" pitchFamily="34" charset="0"/>
               </a:rPr>
               <a:t>YES</a:t>
             </a:r>
@@ -7346,6 +7404,7 @@
                 <a:solidFill>
                   <a:srgbClr val="C00000"/>
                 </a:solidFill>
+                <a:latin typeface="Aptos" panose="020B0004020202020204" pitchFamily="34" charset="0"/>
               </a:rPr>
               <a:t>NO</a:t>
             </a:r>
@@ -7438,7 +7497,7 @@
             <a:pPr algn="ctr"/>
             <a:r>
               <a:rPr lang="en-IT" dirty="0">
-                <a:latin typeface="Palatino Linotype" panose="02040502050505030304" pitchFamily="18" charset="0"/>
+                <a:latin typeface="Aptos" panose="020B0004020202020204" pitchFamily="34" charset="0"/>
               </a:rPr>
               <a:t>Refresh token expired?</a:t>
             </a:r>
@@ -7488,7 +7547,7 @@
             <a:pPr algn="ctr"/>
             <a:r>
               <a:rPr lang="en-IT" dirty="0">
-                <a:latin typeface="Palatino Linotype" panose="02040502050505030304" pitchFamily="18" charset="0"/>
+                <a:latin typeface="Aptos" panose="020B0004020202020204" pitchFamily="34" charset="0"/>
               </a:rPr>
               <a:t>Get a new token pair using the refresh token and store it</a:t>
             </a:r>
@@ -7753,6 +7812,7 @@
                 <a:solidFill>
                   <a:srgbClr val="C00000"/>
                 </a:solidFill>
+                <a:latin typeface="Aptos" panose="020B0004020202020204" pitchFamily="34" charset="0"/>
               </a:rPr>
               <a:t>YES</a:t>
             </a:r>
@@ -7975,6 +8035,7 @@
                 <a:solidFill>
                   <a:srgbClr val="C00000"/>
                 </a:solidFill>
+                <a:latin typeface="Aptos" panose="020B0004020202020204" pitchFamily="34" charset="0"/>
               </a:rPr>
               <a:t>NO</a:t>
             </a:r>
@@ -8027,7 +8088,7 @@
     </p:spTree>
     <p:extLst>
       <p:ext uri="{BB962C8B-B14F-4D97-AF65-F5344CB8AC3E}">
-        <p14:creationId xmlns:p14="http://schemas.microsoft.com/office/powerpoint/2010/main" val="1048633781"/>
+        <p14:creationId xmlns:p14="http://schemas.microsoft.com/office/powerpoint/2010/main" val="1703188139"/>
       </p:ext>
     </p:extLst>
   </p:cSld>
@@ -8592,8 +8653,34 @@
           </a:lstStyle>
           <a:p>
             <a:r>
-              <a:rPr lang="en-IT" dirty="0"/>
-              <a:t>For example, let’s obtain the steps data of 2023, May, 4th</a:t>
+              <a:rPr lang="en-IT" dirty="0">
+                <a:latin typeface="Aptos" panose="020B0004020202020204" pitchFamily="34" charset="0"/>
+              </a:rPr>
+              <a:t>For example, let’s obtain the steps data </a:t>
+            </a:r>
+            <a:r>
+              <a:rPr lang="en-IT">
+                <a:latin typeface="Aptos" panose="020B0004020202020204" pitchFamily="34" charset="0"/>
+              </a:rPr>
+              <a:t>of 202</a:t>
+            </a:r>
+            <a:r>
+              <a:rPr lang="en-US" dirty="0">
+                <a:latin typeface="Aptos" panose="020B0004020202020204" pitchFamily="34" charset="0"/>
+              </a:rPr>
+              <a:t>5</a:t>
+            </a:r>
+            <a:r>
+              <a:rPr lang="en-IT">
+                <a:latin typeface="Aptos" panose="020B0004020202020204" pitchFamily="34" charset="0"/>
+              </a:rPr>
+              <a:t>, </a:t>
+            </a:r>
+            <a:r>
+              <a:rPr lang="en-IT" dirty="0">
+                <a:latin typeface="Aptos" panose="020B0004020202020204" pitchFamily="34" charset="0"/>
+              </a:rPr>
+              <a:t>May, 4th</a:t>
             </a:r>
           </a:p>
         </p:txBody>
@@ -9320,26 +9407,38 @@
           </a:lstStyle>
           <a:p>
             <a:r>
-              <a:rPr lang="en-IT" dirty="0"/>
+              <a:rPr lang="en-IT" dirty="0">
+                <a:latin typeface="Aptos" panose="020B0004020202020204" pitchFamily="34" charset="0"/>
+              </a:rPr>
               <a:t>Let’s </a:t>
             </a:r>
             <a:r>
-              <a:rPr lang="en-IT"/>
+              <a:rPr lang="en-IT">
+                <a:latin typeface="Aptos" panose="020B0004020202020204" pitchFamily="34" charset="0"/>
+              </a:rPr>
               <a:t>implement </a:t>
             </a:r>
             <a:r>
-              <a:rPr lang="en-US" dirty="0"/>
+              <a:rPr lang="en-US" dirty="0">
+                <a:latin typeface="Aptos" panose="020B0004020202020204" pitchFamily="34" charset="0"/>
+              </a:rPr>
               <a:t>(a subset of) </a:t>
             </a:r>
             <a:r>
-              <a:rPr lang="en-IT"/>
+              <a:rPr lang="en-IT">
+                <a:latin typeface="Aptos" panose="020B0004020202020204" pitchFamily="34" charset="0"/>
+              </a:rPr>
               <a:t>the </a:t>
             </a:r>
             <a:r>
-              <a:rPr lang="en-IT" dirty="0"/>
+              <a:rPr lang="en-IT" dirty="0">
+                <a:latin typeface="Aptos" panose="020B0004020202020204" pitchFamily="34" charset="0"/>
+              </a:rPr>
               <a:t>operations required to request the data</a:t>
             </a:r>
-            <a:endParaRPr lang="en-IT" b="1" dirty="0"/>
+            <a:endParaRPr lang="en-IT" b="1" dirty="0">
+              <a:latin typeface="Aptos" panose="020B0004020202020204" pitchFamily="34" charset="0"/>
+            </a:endParaRPr>
           </a:p>
         </p:txBody>
       </p:sp>
@@ -9561,6 +9660,7 @@
             </a:pPr>
             <a:r>
               <a:rPr lang="en-IT" sz="1600" dirty="0">
+                <a:latin typeface="Aptos" panose="020B0004020202020204" pitchFamily="34" charset="0"/>
                 <a:ea typeface="Palatino" pitchFamily="2" charset="77"/>
               </a:rPr>
               <a:t>Full example in lab_10-requesting_data/get_step/</a:t>
@@ -9611,7 +9711,7 @@
             <a:pPr algn="ctr"/>
             <a:r>
               <a:rPr lang="en-IT" dirty="0">
-                <a:latin typeface="Palatino Linotype" panose="02040502050505030304" pitchFamily="18" charset="0"/>
+                <a:latin typeface="Aptos" panose="020B0004020202020204" pitchFamily="34" charset="0"/>
               </a:rPr>
               <a:t>Access token expired?</a:t>
             </a:r>
@@ -9661,7 +9761,7 @@
             <a:pPr algn="ctr"/>
             <a:r>
               <a:rPr lang="en-IT" dirty="0">
-                <a:latin typeface="Palatino Linotype" panose="02040502050505030304" pitchFamily="18" charset="0"/>
+                <a:latin typeface="Aptos" panose="020B0004020202020204" pitchFamily="34" charset="0"/>
               </a:rPr>
               <a:t>Make a call to get data using access token</a:t>
             </a:r>
@@ -10013,6 +10113,7 @@
                 <a:solidFill>
                   <a:srgbClr val="C00000"/>
                 </a:solidFill>
+                <a:latin typeface="Aptos" panose="020B0004020202020204" pitchFamily="34" charset="0"/>
               </a:rPr>
               <a:t>YES</a:t>
             </a:r>
@@ -10235,6 +10336,7 @@
                 <a:solidFill>
                   <a:srgbClr val="C00000"/>
                 </a:solidFill>
+                <a:latin typeface="Aptos" panose="020B0004020202020204" pitchFamily="34" charset="0"/>
               </a:rPr>
               <a:t>NO</a:t>
             </a:r>
@@ -10284,7 +10386,7 @@
             <a:pPr algn="ctr"/>
             <a:r>
               <a:rPr lang="en-IT" dirty="0">
-                <a:latin typeface="Palatino Linotype" panose="02040502050505030304" pitchFamily="18" charset="0"/>
+                <a:latin typeface="Aptos" panose="020B0004020202020204" pitchFamily="34" charset="0"/>
               </a:rPr>
               <a:t>Get a new token pair using the refresh token and store it</a:t>
             </a:r>
